--- a/docs/presentacion/WatchGate_plantilla.pptx
+++ b/docs/presentacion/WatchGate_plantilla.pptx
@@ -5139,8 +5139,8 @@
         </p:blipFill>
         <p:spPr>
           <a:xfrm>
-            <a:off x="2189858" y="1444752"/>
-            <a:ext cx="7811978" cy="4937760"/>
+            <a:off x="2299134" y="1444752"/>
+            <a:ext cx="7593426" cy="4937760"/>
           </a:xfrm>
           <a:prstGeom prst="rect">
             <a:avLst/>

--- a/docs/presentacion/WatchGate_plantilla.pptx
+++ b/docs/presentacion/WatchGate_plantilla.pptx
@@ -5139,8 +5139,8 @@
         </p:blipFill>
         <p:spPr>
           <a:xfrm>
-            <a:off x="2299134" y="1444752"/>
-            <a:ext cx="7593426" cy="4937760"/>
+            <a:off x="2617845" y="1444752"/>
+            <a:ext cx="6956005" cy="4937760"/>
           </a:xfrm>
           <a:prstGeom prst="rect">
             <a:avLst/>

--- a/docs/presentacion/WatchGate_plantilla.pptx
+++ b/docs/presentacion/WatchGate_plantilla.pptx
@@ -5139,8 +5139,8 @@
         </p:blipFill>
         <p:spPr>
           <a:xfrm>
-            <a:off x="2617845" y="1444752"/>
-            <a:ext cx="6956005" cy="4937760"/>
+            <a:off x="1986007" y="1444752"/>
+            <a:ext cx="8219680" cy="4937760"/>
           </a:xfrm>
           <a:prstGeom prst="rect">
             <a:avLst/>
